--- a/docs/presentation/mini-systems-presentation.pptx
+++ b/docs/presentation/mini-systems-presentation.pptx
@@ -752,7 +752,7 @@
           </a:p>
           <a:p>
             <a:r>
-              <a:t>Tempo previsto: 01:10 | Janela: 10:50–12:00</a:t>
+              <a:t>Tempo previsto: 01:05 | Janela: 10:55–12:00</a:t>
             </a:r>
           </a:p>
           <a:p/>
@@ -2587,7 +2587,7 @@
           <a:p/>
           <a:p>
             <a:r>
-              <a:t>Os operadores podem ser escritos com parâmetros e depois instanciados para objetos concretos, como RM_A5. Essa representação é inspirada em STRIPS, mas não reproduz toda a expressividade do sistema histórico. O trabalho adota uma forma simplificada, apropriada à busca sobre conjuntos finitos de predicados. A vantagem é que podemos executar novamente cada transição e verificar a validade do plano de maneira direta.</a:t>
+              <a:t>Os operadores podem ser escritos com parâmetros e depois instanciados para objetos concretos, como ER_03. Essa representação é inspirada em STRIPS, mas não reproduz toda a expressividade do sistema histórico. O trabalho adota uma forma simplificada, apropriada à busca sobre conjuntos finitos de predicados. A vantagem é que podemos executar novamente cada transição e verificar a validade do plano de maneira direta.</a:t>
             </a:r>
           </a:p>
           <a:p/>
@@ -3010,7 +3010,7 @@
           </a:p>
           <a:p>
             <a:r>
-              <a:t>Tempo previsto: 01:13 | Janela: 02:00–03:13</a:t>
+              <a:t>Tempo previsto: 01:08 | Janela: 02:00–03:08</a:t>
             </a:r>
           </a:p>
           <a:p/>
@@ -4085,7 +4085,7 @@
           </a:p>
           <a:p>
             <a:r>
-              <a:t>Tempo previsto: 01:24 | Janela: 56:00–57:24</a:t>
+              <a:t>Tempo previsto: 01:13 | Janela: 56:00–57:13</a:t>
             </a:r>
           </a:p>
           <a:p/>
@@ -4188,7 +4188,7 @@
           </a:p>
           <a:p>
             <a:r>
-              <a:t>Tempo previsto: 01:13 | Janela: 03:13–04:26</a:t>
+              <a:t>Tempo previsto: 01:07 | Janela: 03:08–04:15</a:t>
             </a:r>
           </a:p>
           <a:p/>
@@ -4291,7 +4291,7 @@
           </a:p>
           <a:p>
             <a:r>
-              <a:t>Tempo previsto: 01:33 | Janela: 57:24–58:57</a:t>
+              <a:t>Tempo previsto: 01:20 | Janela: 57:13–58:33</a:t>
             </a:r>
           </a:p>
           <a:p/>
@@ -4411,7 +4411,7 @@
           </a:p>
           <a:p>
             <a:r>
-              <a:t>Tempo previsto: 01:32 | Janela: 58:57–60:29</a:t>
+              <a:t>Tempo previsto: 01:19 | Janela: 58:33–59:52</a:t>
             </a:r>
           </a:p>
           <a:p/>
@@ -4531,7 +4531,7 @@
           </a:p>
           <a:p>
             <a:r>
-              <a:t>Tempo previsto: 01:29 | Janela: 60:29–61:58</a:t>
+              <a:t>Tempo previsto: 01:17 | Janela: 59:52–61:09</a:t>
             </a:r>
           </a:p>
           <a:p/>
@@ -4640,7 +4640,7 @@
           </a:p>
           <a:p>
             <a:r>
-              <a:t>Tempo previsto: 01:33 | Janela: 61:58–63:31</a:t>
+              <a:t>Tempo previsto: 01:20 | Janela: 61:09–62:29</a:t>
             </a:r>
           </a:p>
           <a:p/>
@@ -4760,7 +4760,7 @@
           </a:p>
           <a:p>
             <a:r>
-              <a:t>Tempo previsto: 01:35 | Janela: 63:31–65:06</a:t>
+              <a:t>Tempo previsto: 01:22 | Janela: 62:29–63:51</a:t>
             </a:r>
           </a:p>
           <a:p/>
@@ -4859,7 +4859,7 @@
           <a:lstStyle/>
           <a:p>
             <a:r>
-              <a:t>SLIDE 45 — Comparação: LTE_ENB → AP_B</a:t>
+              <a:t>SLIDE 45 — Comparação: NOC → ER_03</a:t>
             </a:r>
           </a:p>
           <a:p>
@@ -4869,7 +4869,7 @@
           </a:p>
           <a:p>
             <a:r>
-              <a:t>Tempo previsto: 02:38 | Janela: 65:06–67:44</a:t>
+              <a:t>Tempo previsto: 03:04 | Janela: 63:51–66:55</a:t>
             </a:r>
           </a:p>
           <a:p/>
@@ -4880,19 +4880,25 @@
           </a:p>
           <a:p>
             <a:r>
-              <a:t>Esta comparação utiliza a mesma origem, o mesmo destino e os mesmos pesos. A busca em largura encontra dois saltos, mas seu custo é maior que o caminho de três saltos encontrado por custo uniforme e A*.</a:t>
+              <a:t>Esta comparação utiliza a mesma origem, o mesmo destino e os mesmos pesos. O ponto central está na primeira linha. A busca em largura encontra quatro saltos, e é o menor número de saltos possível, mas custa quatrocentos e cinquenta e três vírgula cinquenta e um. O caminho de cinco saltos devolvido por custo uniforme e por A* custa trezentos e sessenta vírgula trinta e cinco.</a:t>
             </a:r>
           </a:p>
           <a:p/>
           <a:p>
             <a:r>
-              <a:t>A busca gulosa expande menos estados nesta instância, mas devolve o caminho caro. Esse resultado mostra por que menor esforço de busca, isoladamente, não caracteriza melhor solução. A busca em profundidade encontra um caminho ainda mais caro, dependente da ordem de exploração.</a:t>
+              <a:t>A explicação é física, não numérica. O caminho curto em saltos desce para a malha de 900 MHz, que é lenta e acumula atraso de armazena-e-encaminha a cada repetidor. O caminho com um salto a mais permanece no LTE privativo, que é rápido. Contar saltos e minimizar custo são objetivos diferentes, e neste par eles discordam.</a:t>
             </a:r>
           </a:p>
           <a:p/>
           <a:p>
             <a:r>
-              <a:t>A* e custo uniforme chegam ao mesmo custo, enquanto A* expande quatro estados e custo uniforme expande seis. Essa é uma observação da instância, não uma garantia de economia idêntica em qualquer problema.</a:t>
+              <a:t>A busca gulosa acerta o custo nesta instância expandindo apenas sete estados, mas essa coincidência não é garantia: a heurística poderia conduzi-la a um caminho caro em outro par. A busca em profundidade encontra o mesmo caminho da largura, dependente da ordem de exploração.</a:t>
+            </a:r>
+          </a:p>
+          <a:p/>
+          <a:p>
+            <a:r>
+              <a:t>A* e custo uniforme chegam ao mesmo custo, enquanto A* expande vinte e três estados e custo uniforme expande vinte e oito. Essa é uma observação da instância, não uma garantia de economia idêntica em qualquer problema.</a:t>
             </a:r>
           </a:p>
           <a:p/>
@@ -4989,7 +4995,7 @@
           </a:p>
           <a:p>
             <a:r>
-              <a:t>Tempo previsto: 01:32 | Janela: 67:44–69:16</a:t>
+              <a:t>Tempo previsto: 01:59 | Janela: 66:55–68:54</a:t>
             </a:r>
           </a:p>
           <a:p/>
@@ -5000,7 +5006,13 @@
           </a:p>
           <a:p>
             <a:r>
-              <a:t>O caminho devolvido por A* passa por LTE_CORE e NOC antes de alcançar AP_B. A tabela decompõe o custo por enlace e mostra o acumulado.</a:t>
+              <a:t>O caminho devolvido por A* sai do núcleo pela fibra até o eNodeB, atravessa dois repetidores LTE e termina no CPE do site, que entrega ao roteador de borda por cabo. A tabela decompõe o custo por enlace e mostra o acumulado.</a:t>
+            </a:r>
+          </a:p>
+          <a:p/>
+          <a:p>
+            <a:r>
+              <a:t>Observe onde está o custo. Os três saltos de rádio LTE somam duzentos e noventa e um vírgula setenta e um, e o último salto por cabo custa oito vírgula sessenta e cinco. O meio domina o custo, e é por isso que a escolha entre LTE e 900 MHz importa mais do que o número de saltos.</a:t>
             </a:r>
           </a:p>
           <a:p/>
@@ -5088,7 +5100,7 @@
           <a:lstStyle/>
           <a:p>
             <a:r>
-              <a:t>SLIDE 47 — Falha de enlace e recálculo de rota</a:t>
+              <a:t>SLIDE 47 — Perda de um meio e comutação para o outro</a:t>
             </a:r>
           </a:p>
           <a:p>
@@ -5098,7 +5110,7 @@
           </a:p>
           <a:p>
             <a:r>
-              <a:t>Tempo previsto: 02:36 | Janela: 69:16–71:52</a:t>
+              <a:t>Tempo previsto: 02:29 | Janela: 68:54–71:23</a:t>
             </a:r>
           </a:p>
           <a:p/>
@@ -5109,13 +5121,13 @@
           </a:p>
           <a:p>
             <a:r>
-              <a:t>Agora altero a instância removendo o enlace entre LTE_ENB e LTE_CORE. O caminho anteriormente ótimo deixa de ser viável e a busca deve ser executada sobre o grafo atualizado.</a:t>
+              <a:t>Agora altero a instância desativando a fibra entre o núcleo e o eNodeB A. Isso não remove um enlace qualquer: retira do núcleo todo o caminho de LTE privativo, e portanto o meio que servia este site.</a:t>
             </a:r>
           </a:p>
           <a:p/>
           <a:p>
             <a:r>
-              <a:t>A nova solução utiliza RM_C4 e AP_C para chegar ao núcleo e, em seguida, ao destino. O custo aumenta para aproximadamente trezentos e quarenta e cinco vírgula oitenta na escala do modelo.</a:t>
+              <a:t>O site não fica isolado. A busca encontra a rota pela malha de 900 MHz, e o custo sobe de trezentos e sessenta vírgula trinta e cinco para quatrocentos e cinquenta e três vírgula cinquenta e um. É exatamente isso que o duplo acesso compra, e o preço aparece no custo.</a:t>
             </a:r>
           </a:p>
           <a:p/>
@@ -5208,7 +5220,7 @@
           <a:lstStyle/>
           <a:p>
             <a:r>
-              <a:t>SLIDE 48 — Esforço de busca no cenário de 30 nós</a:t>
+              <a:t>SLIDE 48 — Esforço de busca no cenário de 60 nós</a:t>
             </a:r>
           </a:p>
           <a:p>
@@ -5218,7 +5230,7 @@
           </a:p>
           <a:p>
             <a:r>
-              <a:t>Tempo previsto: 02:39 | Janela: 71:52–74:31</a:t>
+              <a:t>Tempo previsto: 03:19 | Janela: 71:23–74:42</a:t>
             </a:r>
           </a:p>
           <a:p/>
@@ -5229,19 +5241,31 @@
           </a:p>
           <a:p>
             <a:r>
-              <a:t>A avaliação agregada considera todos os pares ordenados de nós distintos: trinta vezes vinte e nove, totalizando oitocentas e setenta consultas.</a:t>
+              <a:t>A avaliação agregada considera todos os pares ordenados de nós distintos: sessenta vezes cinquenta e nove, totalizando três mil quinhentas e quarenta consultas.</a:t>
             </a:r>
           </a:p>
           <a:p/>
           <a:p>
             <a:r>
-              <a:t>Nessas consultas, a busca de custo uniforme realiza treze mil novecentas e vinte expansões, enquanto A* realiza dez mil trezentas e dez. A redução agregada é aproximadamente vinte e cinco vírgula nove por cento. Os custos das soluções coincidem em todos os pares verificados.</a:t>
+              <a:t>Nessas consultas, a busca de custo uniforme realiza cento e nove mil setecentas e quarenta expansões, enquanto A* realiza noventa e nove mil novecentas e sessenta e três. A redução agregada é aproximadamente oito vírgula nove por cento. Os custos coincidem em todos os pares verificados.</a:t>
             </a:r>
           </a:p>
           <a:p/>
           <a:p>
             <a:r>
-              <a:t>Esse resultado caracteriza o grafo e a heurística utilizados. Não demonstra que a vantagem cresça necessariamente com o número de nós, porque conectividade, pesos, distribuição de consultas e desempates também afetam o esforço. Além disso, os pares compartilham a mesma topologia e não são replicações independentes de redes.</a:t>
+              <a:t>Peço atenção a este ponto, porque ele contraria a expectativa comum. No cenário de trinta nós a redução era de vinte e cinco vírgula nove por cento. Ao dobrar o número de nós, ela caiu para oito vírgula nove por cento. A vantagem da heurística não cresceu com o tamanho do grafo: diminuiu.</a:t>
+            </a:r>
+          </a:p>
+          <a:p/>
+          <a:p>
+            <a:r>
+              <a:t>A explicação está na estrutura, não no tamanho. Este cenário tem duas redes de acesso quase paralelas, e a distância em linha reta informa pouco sobre qual meio é mais barato, porque meios diferentes têm velocidades diferentes. Uma heurística geométrica é fraca quando a geometria não prediz o custo.</a:t>
+            </a:r>
+          </a:p>
+          <a:p/>
+          <a:p>
+            <a:r>
+              <a:t>Se eu tivesse apresentado apenas o resultado de trinta nós, a leitura natural seria que a vantagem cresce com o grafo. Duas medições em dois grafos mostram o contrário e continuam sendo apenas duas medições. Para estudar escalabilidade seria necessário variar sistematicamente tamanho e estrutura, controlar os demais fatores e medir tempo, memória e distribuição do esforço.</a:t>
             </a:r>
           </a:p>
           <a:p/>
@@ -5338,7 +5362,7 @@
           </a:p>
           <a:p>
             <a:r>
-              <a:t>Tempo previsto: 01:29 | Janela: 74:31–76:00</a:t>
+              <a:t>Tempo previsto: 01:18 | Janela: 74:42–76:00</a:t>
             </a:r>
           </a:p>
           <a:p/>
@@ -5447,7 +5471,7 @@
           </a:p>
           <a:p>
             <a:r>
-              <a:t>Tempo previsto: 01:15 | Janela: 04:26–05:41</a:t>
+              <a:t>Tempo previsto: 01:55 | Janela: 04:15–06:10</a:t>
             </a:r>
           </a:p>
           <a:p/>
@@ -5458,19 +5482,31 @@
           </a:p>
           <a:p>
             <a:r>
-              <a:t>A topologia organiza trinta nós em três setores, conectados a um núcleo de comunicação. Existem enlaces com diferentes tipos e custos, além de caminhos alternativos que tornam o roteamento um problema relevante.</a:t>
+              <a:t>A topologia organiza sessenta nós em duas redes de acesso independentes que alcançam os mesmos quinze sites da rede elétrica. De um lado, uma estrela de LTE privativo com dois eNodeBs e um nível de repetidores. Do outro, uma malha de 900 MHz do tipo armazena-e-encaminha. As duas se encontram apenas no roteador de borda de cada site.</a:t>
             </a:r>
           </a:p>
           <a:p/>
           <a:p>
             <a:r>
-              <a:t>Os identificadores permitem acompanhar um incidente entre os módulos. RM_A5 será utilizado no exemplo de contenção, enquanto outros pares ilustrarão a seleção de rotas. As coordenadas pertencem ao modelo; não descrevem o posicionamento de equipamentos reais em uma sala. A figura é um esquema de conectividade e deve ser interpretada dessa maneira.</a:t>
+              <a:t>Essa estrutura é deliberada, e corrige um defeito do cenário anterior. Ali o eNodeB aparecia como vértice de trânsito, o que permitia caminhos que entravam pelo LTE e saíam por outro meio sem passar pelo núcleo. Um eNodeB é nó de acesso, não roteador de trânsito entre assinantes.</a:t>
             </a:r>
           </a:p>
           <a:p/>
           <a:p>
             <a:r>
-              <a:t>É importante separar o tamanho do grafo da quantidade de observações de diagnóstico. Ter trinta nós não significa dispor de trinta amostras independentes de falha. Da mesma forma, avaliar todos os pares de roteamento examina um conjunto de problemas sobre o mesmo grafo, e não uma coleção de redes independentes. Essa distinção será retomada na avaliação experimental.</a:t>
+              <a:t>O roteador de borda também não faz trânsito. Ele é a fronteira da rede elétrica, e um site não transporta o tráfego de backhaul de um site vizinho. Essa restrição está declarada no modelo e é respeitada tanto pela busca quanto pelo oráculo de verificação.</a:t>
+            </a:r>
+          </a:p>
+          <a:p/>
+          <a:p>
+            <a:r>
+              <a:t>Os identificadores permitem acompanhar um incidente entre os módulos. ER_03 será utilizado no exemplo de contenção, enquanto outros pares ilustrarão a seleção de rotas. As coordenadas pertencem ao modelo e não descrevem posicionamento de equipamentos reais.</a:t>
+            </a:r>
+          </a:p>
+          <a:p/>
+          <a:p>
+            <a:r>
+              <a:t>É importante separar o tamanho do grafo da quantidade de observações de diagnóstico. Ter sessenta nós não significa dispor de sessenta amostras independentes de falha. Avaliar todos os pares de roteamento examina um conjunto de problemas sobre o mesmo grafo, e não uma coleção de redes independentes.</a:t>
             </a:r>
           </a:p>
           <a:p/>
@@ -5572,7 +5608,7 @@
           </a:p>
           <a:p>
             <a:r>
-              <a:t>Tempo previsto: 01:41 | Janela: 76:00–77:41</a:t>
+              <a:t>Tempo previsto: 01:37 | Janela: 76:00–77:37</a:t>
             </a:r>
           </a:p>
           <a:p/>
@@ -5681,7 +5717,7 @@
           </a:p>
           <a:p>
             <a:r>
-              <a:t>Tempo previsto: 02:57 | Janela: 77:41–80:38</a:t>
+              <a:t>Tempo previsto: 03:08 | Janela: 77:37–80:45</a:t>
             </a:r>
           </a:p>
           <a:p/>
@@ -5692,19 +5728,19 @@
           </a:p>
           <a:p>
             <a:r>
-              <a:t>O incidente integrado utiliza o caso ilustrativo de congestionamento associado a SAF_A1. A origem é NOC e o destino é FD_A. O sistema especialista produz a hipótese congestion com suporte zero vírgula oitocentos e oitenta e oito.</a:t>
+              <a:t>O incidente integrado utiliza o caso ilustrativo de congestionamento associado a SAF_02, um repetidor da malha de 900 MHz. A origem é NOC e o destino é ER_06, um site normalmente servido por essa malha. O sistema especialista produz a hipótese congestion com suporte zero vírgula oitocentos e oitenta e oito.</a:t>
             </a:r>
           </a:p>
           <a:p/>
           <a:p>
             <a:r>
-              <a:t>A integração converte essa hipótese em uma condição do problema de planejamento. A disponibilidade de rota alternativa é verificada evitando SAF_A1 e preservando FD_A como destino. O plano inclui o operador de desvio e é validado pela reaplicação das ações.</a:t>
+              <a:t>A integração converte essa hipótese em uma condição do problema de planejamento. A disponibilidade de rota alternativa é verificada evitando SAF_02 e preservando ER_06 como destino. O plano inclui o operador de desvio e é validado pela reaplicação das ações.</a:t>
             </a:r>
           </a:p>
           <a:p/>
           <a:p>
             <a:r>
-              <a:t>A rota apresentada passa por LTE_CORE e LTE_ENB e alcança FD_A sem atravessar o nó afetado. O custo é aproximadamente duzentos e sessenta e sete vírgula zero seis na escala do modelo.</a:t>
+              <a:t>A rota apresentada abandona a malha de 900 MHz e alcança ER_06 pelo LTE privativo, sem atravessar o repetidor afetado. O custo sobe para aproximadamente quinhentos e nove vírgula cinquenta e cinco na escala do modelo, porque o desvio troca o meio de acesso do site.</a:t>
             </a:r>
           </a:p>
           <a:p/>
@@ -5801,7 +5837,7 @@
           </a:p>
           <a:p>
             <a:r>
-              <a:t>Tempo previsto: 01:43 | Janela: 80:38–82:21</a:t>
+              <a:t>Tempo previsto: 01:39 | Janela: 80:45–82:24</a:t>
             </a:r>
           </a:p>
           <a:p/>
@@ -5921,7 +5957,7 @@
           </a:p>
           <a:p>
             <a:r>
-              <a:t>Tempo previsto: 01:39 | Janela: 82:21–84:00</a:t>
+              <a:t>Tempo previsto: 01:36 | Janela: 82:24–84:00</a:t>
             </a:r>
           </a:p>
           <a:p/>
@@ -6501,7 +6537,7 @@
           </a:p>
           <a:p>
             <a:r>
-              <a:t>Tempo previsto: 01:16 | Janela: 05:41–06:57</a:t>
+              <a:t>Tempo previsto: 01:10 | Janela: 06:10–07:20</a:t>
             </a:r>
           </a:p>
           <a:p/>
@@ -6604,7 +6640,7 @@
           </a:p>
           <a:p>
             <a:r>
-              <a:t>Tempo previsto: 01:18 | Janela: 06:57–08:15</a:t>
+              <a:t>Tempo previsto: 01:12 | Janela: 07:20–08:32</a:t>
             </a:r>
           </a:p>
           <a:p/>
@@ -6713,7 +6749,7 @@
           </a:p>
           <a:p>
             <a:r>
-              <a:t>Tempo previsto: 01:18 | Janela: 08:15–09:33</a:t>
+              <a:t>Tempo previsto: 01:12 | Janela: 08:32–09:44</a:t>
             </a:r>
           </a:p>
           <a:p/>
@@ -6816,7 +6852,7 @@
           </a:p>
           <a:p>
             <a:r>
-              <a:t>Tempo previsto: 01:17 | Janela: 09:33–10:50</a:t>
+              <a:t>Tempo previsto: 01:11 | Janela: 09:44–10:55</a:t>
             </a:r>
           </a:p>
           <a:p/>
@@ -33318,7 +33354,7 @@
                 </a:solidFill>
                 <a:latin typeface="Consolas"/>
               </a:rPr>
-              <a:t>1  request_authorization(RM_A5)   1</a:t>
+              <a:t>1  request_authorization(ER_03)   1</a:t>
             </a:r>
           </a:p>
           <a:p>
@@ -33340,7 +33376,7 @@
                 </a:solidFill>
                 <a:latin typeface="Consolas"/>
               </a:rPr>
-              <a:t>2  stop_run(RM_A5)                2</a:t>
+              <a:t>2  stop_run(ER_03)                2</a:t>
             </a:r>
           </a:p>
           <a:p>
@@ -33362,7 +33398,7 @@
                 </a:solidFill>
                 <a:latin typeface="Consolas"/>
               </a:rPr>
-              <a:t>3  separate_channels(RM_A5)       3</a:t>
+              <a:t>3  separate_channels(ER_03)       3</a:t>
             </a:r>
           </a:p>
           <a:p>
@@ -33384,7 +33420,7 @@
                 </a:solidFill>
                 <a:latin typeface="Consolas"/>
               </a:rPr>
-              <a:t>4  start_run(RM_A5)               2</a:t>
+              <a:t>4  start_run(ER_03)               2</a:t>
             </a:r>
           </a:p>
           <a:p>
@@ -33406,7 +33442,7 @@
                 </a:solidFill>
                 <a:latin typeface="Consolas"/>
               </a:rPr>
-              <a:t>5  verify_link(RM_A5)             1</a:t>
+              <a:t>5  verify_link(ER_03)             1</a:t>
             </a:r>
           </a:p>
           <a:p>
@@ -33428,7 +33464,7 @@
                 </a:solidFill>
                 <a:latin typeface="Consolas"/>
               </a:rPr>
-              <a:t>6  record_logbook(RM_A5)          1</a:t>
+              <a:t>6  record_logbook(ER_03)          1</a:t>
             </a:r>
           </a:p>
           <a:p>
@@ -33450,7 +33486,7 @@
                 </a:solidFill>
                 <a:latin typeface="Consolas"/>
               </a:rPr>
-              <a:t>7  close_work_order(RM_A5)        1</a:t>
+              <a:t>7  close_work_order(ER_03)        1</a:t>
             </a:r>
           </a:p>
           <a:p>
@@ -40333,7 +40369,7 @@
                 </a:solidFill>
                 <a:latin typeface="Aptos"/>
               </a:rPr>
-              <a:t>Comparação: LTE_ENB → AP_B</a:t>
+              <a:t>Comparação: NOC → ER_03</a:t>
             </a:r>
           </a:p>
         </p:txBody>
@@ -40615,7 +40651,7 @@
                           </a:solidFill>
                           <a:latin typeface="Aptos"/>
                         </a:rPr>
-                        <a:t>2</a:t>
+                        <a:t>4</a:t>
                       </a:r>
                     </a:p>
                   </a:txBody>
@@ -40647,7 +40683,7 @@
                           </a:solidFill>
                           <a:latin typeface="Aptos"/>
                         </a:rPr>
-                        <a:t>381,46 ms</a:t>
+                        <a:t>453,51 ms</a:t>
                       </a:r>
                     </a:p>
                   </a:txBody>
@@ -40679,7 +40715,7 @@
                           </a:solidFill>
                           <a:latin typeface="Aptos"/>
                         </a:rPr>
-                        <a:t>7</a:t>
+                        <a:t>15</a:t>
                       </a:r>
                     </a:p>
                   </a:txBody>
@@ -40777,7 +40813,7 @@
                           </a:solidFill>
                           <a:latin typeface="Aptos"/>
                         </a:rPr>
-                        <a:t>6</a:t>
+                        <a:t>4</a:t>
                       </a:r>
                     </a:p>
                   </a:txBody>
@@ -40809,7 +40845,7 @@
                           </a:solidFill>
                           <a:latin typeface="Aptos"/>
                         </a:rPr>
-                        <a:t>694,78 ms</a:t>
+                        <a:t>453,51 ms</a:t>
                       </a:r>
                     </a:p>
                   </a:txBody>
@@ -40939,7 +40975,7 @@
                           </a:solidFill>
                           <a:latin typeface="Aptos"/>
                         </a:rPr>
-                        <a:t>3</a:t>
+                        <a:t>5</a:t>
                       </a:r>
                     </a:p>
                   </a:txBody>
@@ -40971,7 +41007,7 @@
                           </a:solidFill>
                           <a:latin typeface="Aptos"/>
                         </a:rPr>
-                        <a:t>70,51 ms</a:t>
+                        <a:t>360,35 ms</a:t>
                       </a:r>
                     </a:p>
                   </a:txBody>
@@ -41003,7 +41039,7 @@
                           </a:solidFill>
                           <a:latin typeface="Aptos"/>
                         </a:rPr>
-                        <a:t>6</a:t>
+                        <a:t>28</a:t>
                       </a:r>
                     </a:p>
                   </a:txBody>
@@ -41101,7 +41137,7 @@
                           </a:solidFill>
                           <a:latin typeface="Aptos"/>
                         </a:rPr>
-                        <a:t>2</a:t>
+                        <a:t>5</a:t>
                       </a:r>
                     </a:p>
                   </a:txBody>
@@ -41133,7 +41169,7 @@
                           </a:solidFill>
                           <a:latin typeface="Aptos"/>
                         </a:rPr>
-                        <a:t>381,46 ms</a:t>
+                        <a:t>360,35 ms</a:t>
                       </a:r>
                     </a:p>
                   </a:txBody>
@@ -41165,7 +41201,7 @@
                           </a:solidFill>
                           <a:latin typeface="Aptos"/>
                         </a:rPr>
-                        <a:t>3</a:t>
+                        <a:t>7</a:t>
                       </a:r>
                     </a:p>
                   </a:txBody>
@@ -41263,7 +41299,7 @@
                           </a:solidFill>
                           <a:latin typeface="Aptos"/>
                         </a:rPr>
-                        <a:t>3</a:t>
+                        <a:t>5</a:t>
                       </a:r>
                     </a:p>
                   </a:txBody>
@@ -41295,7 +41331,7 @@
                           </a:solidFill>
                           <a:latin typeface="Aptos"/>
                         </a:rPr>
-                        <a:t>70,51 ms</a:t>
+                        <a:t>360,35 ms</a:t>
                       </a:r>
                     </a:p>
                   </a:txBody>
@@ -41327,7 +41363,7 @@
                           </a:solidFill>
                           <a:latin typeface="Aptos"/>
                         </a:rPr>
-                        <a:t>4</a:t>
+                        <a:t>23</a:t>
                       </a:r>
                     </a:p>
                   </a:txBody>
@@ -41457,7 +41493,7 @@
                 </a:solidFill>
                 <a:latin typeface="Aptos"/>
               </a:rPr>
-              <a:t>Mesma instância e mesma função de custo; contagem inclui a remoção do objetivo.</a:t>
+              <a:t>O caminho mais barato tem MAIS saltos: contar saltos não ordena por custo.</a:t>
             </a:r>
           </a:p>
         </p:txBody>
@@ -41660,7 +41696,7 @@
         </p:nvGraphicFramePr>
         <p:xfrm>
           <a:off x="777240" y="1399032"/>
-          <a:ext cx="10744200" cy="2779776"/>
+          <a:ext cx="10744200" cy="4069079"/>
         </p:xfrm>
         <a:graphic>
           <a:graphicData uri="http://schemas.openxmlformats.org/drawingml/2006/table">
@@ -41804,7 +41840,7 @@
                   </a:tcPr>
                 </a:tc>
               </a:tr>
-              <a:tr h="771144">
+              <a:tr h="720547">
                 <a:tc>
                   <a:txBody>
                     <a:bodyPr wrap="square">
@@ -41821,13 +41857,13 @@
                         </a:spcAft>
                       </a:pPr>
                       <a:r>
-                        <a:rPr sz="1800" b="1">
+                        <a:rPr sz="1700" b="1">
                           <a:solidFill>
                             <a:srgbClr val="172235"/>
                           </a:solidFill>
                           <a:latin typeface="Aptos"/>
                         </a:rPr>
-                        <a:t>LTE_ENB → LTE_CORE</a:t>
+                        <a:t>NOC → eNB_A</a:t>
                       </a:r>
                     </a:p>
                   </a:txBody>
@@ -41853,7 +41889,7 @@
                         </a:spcAft>
                       </a:pPr>
                       <a:r>
-                        <a:rPr sz="1800" b="0">
+                        <a:rPr sz="1700" b="0">
                           <a:solidFill>
                             <a:srgbClr val="172235"/>
                           </a:solidFill>
@@ -41885,13 +41921,13 @@
                         </a:spcAft>
                       </a:pPr>
                       <a:r>
-                        <a:rPr sz="1800" b="0">
+                        <a:rPr sz="1700" b="0">
                           <a:solidFill>
                             <a:srgbClr val="172235"/>
                           </a:solidFill>
                           <a:latin typeface="Aptos"/>
                         </a:rPr>
-                        <a:t>13,86 ms</a:t>
+                        <a:t>60,00 ms</a:t>
                       </a:r>
                     </a:p>
                   </a:txBody>
@@ -41917,13 +41953,13 @@
                         </a:spcAft>
                       </a:pPr>
                       <a:r>
-                        <a:rPr sz="1800" b="0">
+                        <a:rPr sz="1700" b="0">
                           <a:solidFill>
                             <a:srgbClr val="172235"/>
                           </a:solidFill>
                           <a:latin typeface="Aptos"/>
                         </a:rPr>
-                        <a:t>13,86 ms</a:t>
+                        <a:t>60,00 ms</a:t>
                       </a:r>
                     </a:p>
                   </a:txBody>
@@ -41934,7 +41970,7 @@
                   </a:tcPr>
                 </a:tc>
               </a:tr>
-              <a:tr h="771144">
+              <a:tr h="720547">
                 <a:tc>
                   <a:txBody>
                     <a:bodyPr wrap="square">
@@ -41951,13 +41987,13 @@
                         </a:spcAft>
                       </a:pPr>
                       <a:r>
-                        <a:rPr sz="1800" b="1">
+                        <a:rPr sz="1700" b="1">
                           <a:solidFill>
                             <a:srgbClr val="172235"/>
                           </a:solidFill>
                           <a:latin typeface="Aptos"/>
                         </a:rPr>
-                        <a:t>LTE_CORE → NOC</a:t>
+                        <a:t>eNB_A → RELAY_1</a:t>
                       </a:r>
                     </a:p>
                   </a:txBody>
@@ -41983,13 +42019,13 @@
                         </a:spcAft>
                       </a:pPr>
                       <a:r>
-                        <a:rPr sz="1800" b="0">
+                        <a:rPr sz="1700" b="0">
                           <a:solidFill>
                             <a:srgbClr val="172235"/>
                           </a:solidFill>
                           <a:latin typeface="Aptos"/>
                         </a:rPr>
-                        <a:t>Ethernet</a:t>
+                        <a:t>LTE privativo</a:t>
                       </a:r>
                     </a:p>
                   </a:txBody>
@@ -42015,13 +42051,13 @@
                         </a:spcAft>
                       </a:pPr>
                       <a:r>
-                        <a:rPr sz="1800" b="0">
+                        <a:rPr sz="1700" b="0">
                           <a:solidFill>
                             <a:srgbClr val="172235"/>
                           </a:solidFill>
                           <a:latin typeface="Aptos"/>
                         </a:rPr>
-                        <a:t>9,41 ms</a:t>
+                        <a:t>128,73 ms</a:t>
                       </a:r>
                     </a:p>
                   </a:txBody>
@@ -42047,13 +42083,13 @@
                         </a:spcAft>
                       </a:pPr>
                       <a:r>
-                        <a:rPr sz="1800" b="0">
+                        <a:rPr sz="1700" b="0">
                           <a:solidFill>
                             <a:srgbClr val="172235"/>
                           </a:solidFill>
                           <a:latin typeface="Aptos"/>
                         </a:rPr>
-                        <a:t>23,27 ms</a:t>
+                        <a:t>188,73 ms</a:t>
                       </a:r>
                     </a:p>
                   </a:txBody>
@@ -42064,7 +42100,7 @@
                   </a:tcPr>
                 </a:tc>
               </a:tr>
-              <a:tr h="771144">
+              <a:tr h="720547">
                 <a:tc>
                   <a:txBody>
                     <a:bodyPr wrap="square">
@@ -42081,13 +42117,13 @@
                         </a:spcAft>
                       </a:pPr>
                       <a:r>
-                        <a:rPr sz="1800" b="1">
+                        <a:rPr sz="1700" b="1">
                           <a:solidFill>
                             <a:srgbClr val="172235"/>
                           </a:solidFill>
                           <a:latin typeface="Aptos"/>
                         </a:rPr>
-                        <a:t>NOC → AP_B</a:t>
+                        <a:t>RELAY_1 → RELAY_5</a:t>
                       </a:r>
                     </a:p>
                   </a:txBody>
@@ -42113,13 +42149,13 @@
                         </a:spcAft>
                       </a:pPr>
                       <a:r>
-                        <a:rPr sz="1800" b="0">
+                        <a:rPr sz="1700" b="0">
                           <a:solidFill>
                             <a:srgbClr val="172235"/>
                           </a:solidFill>
                           <a:latin typeface="Aptos"/>
                         </a:rPr>
-                        <a:t>Fibra</a:t>
+                        <a:t>LTE privativo</a:t>
                       </a:r>
                     </a:p>
                   </a:txBody>
@@ -42145,13 +42181,13 @@
                         </a:spcAft>
                       </a:pPr>
                       <a:r>
-                        <a:rPr sz="1800" b="0">
+                        <a:rPr sz="1700" b="0">
                           <a:solidFill>
                             <a:srgbClr val="172235"/>
                           </a:solidFill>
                           <a:latin typeface="Aptos"/>
                         </a:rPr>
-                        <a:t>47,23 ms</a:t>
+                        <a:t>86,33 ms</a:t>
                       </a:r>
                     </a:p>
                   </a:txBody>
@@ -42177,13 +42213,273 @@
                         </a:spcAft>
                       </a:pPr>
                       <a:r>
-                        <a:rPr sz="1800" b="0">
+                        <a:rPr sz="1700" b="0">
                           <a:solidFill>
                             <a:srgbClr val="172235"/>
                           </a:solidFill>
                           <a:latin typeface="Aptos"/>
                         </a:rPr>
-                        <a:t>70,51 ms</a:t>
+                        <a:t>275,05 ms</a:t>
+                      </a:r>
+                    </a:p>
+                  </a:txBody>
+                  <a:tcPr marL="82296" marR="82296" marT="54864" marB="54864" anchor="ctr">
+                    <a:solidFill>
+                      <a:srgbClr val="FFFFFF"/>
+                    </a:solidFill>
+                  </a:tcPr>
+                </a:tc>
+              </a:tr>
+              <a:tr h="720547">
+                <a:tc>
+                  <a:txBody>
+                    <a:bodyPr wrap="square">
+                      <a:noAutofit/>
+                    </a:bodyPr>
+                    <a:lstStyle/>
+                    <a:p>
+                      <a:pPr>
+                        <a:lnSpc>
+                          <a:spcPct val="102000"/>
+                        </a:lnSpc>
+                        <a:spcAft>
+                          <a:spcPts val="0"/>
+                        </a:spcAft>
+                      </a:pPr>
+                      <a:r>
+                        <a:rPr sz="1700" b="1">
+                          <a:solidFill>
+                            <a:srgbClr val="172235"/>
+                          </a:solidFill>
+                          <a:latin typeface="Aptos"/>
+                        </a:rPr>
+                        <a:t>RELAY_5 → CPE_03</a:t>
+                      </a:r>
+                    </a:p>
+                  </a:txBody>
+                  <a:tcPr marL="82296" marR="82296" marT="54864" marB="54864" anchor="ctr">
+                    <a:solidFill>
+                      <a:srgbClr val="F0F2F5"/>
+                    </a:solidFill>
+                  </a:tcPr>
+                </a:tc>
+                <a:tc>
+                  <a:txBody>
+                    <a:bodyPr wrap="square">
+                      <a:noAutofit/>
+                    </a:bodyPr>
+                    <a:lstStyle/>
+                    <a:p>
+                      <a:pPr>
+                        <a:lnSpc>
+                          <a:spcPct val="102000"/>
+                        </a:lnSpc>
+                        <a:spcAft>
+                          <a:spcPts val="0"/>
+                        </a:spcAft>
+                      </a:pPr>
+                      <a:r>
+                        <a:rPr sz="1700" b="0">
+                          <a:solidFill>
+                            <a:srgbClr val="172235"/>
+                          </a:solidFill>
+                          <a:latin typeface="Aptos"/>
+                        </a:rPr>
+                        <a:t>LTE privativo</a:t>
+                      </a:r>
+                    </a:p>
+                  </a:txBody>
+                  <a:tcPr marL="82296" marR="82296" marT="54864" marB="54864" anchor="ctr">
+                    <a:solidFill>
+                      <a:srgbClr val="F0F2F5"/>
+                    </a:solidFill>
+                  </a:tcPr>
+                </a:tc>
+                <a:tc>
+                  <a:txBody>
+                    <a:bodyPr wrap="square">
+                      <a:noAutofit/>
+                    </a:bodyPr>
+                    <a:lstStyle/>
+                    <a:p>
+                      <a:pPr>
+                        <a:lnSpc>
+                          <a:spcPct val="102000"/>
+                        </a:lnSpc>
+                        <a:spcAft>
+                          <a:spcPts val="0"/>
+                        </a:spcAft>
+                      </a:pPr>
+                      <a:r>
+                        <a:rPr sz="1700" b="0">
+                          <a:solidFill>
+                            <a:srgbClr val="172235"/>
+                          </a:solidFill>
+                          <a:latin typeface="Aptos"/>
+                        </a:rPr>
+                        <a:t>76,65 ms</a:t>
+                      </a:r>
+                    </a:p>
+                  </a:txBody>
+                  <a:tcPr marL="82296" marR="82296" marT="54864" marB="54864" anchor="ctr">
+                    <a:solidFill>
+                      <a:srgbClr val="F0F2F5"/>
+                    </a:solidFill>
+                  </a:tcPr>
+                </a:tc>
+                <a:tc>
+                  <a:txBody>
+                    <a:bodyPr wrap="square">
+                      <a:noAutofit/>
+                    </a:bodyPr>
+                    <a:lstStyle/>
+                    <a:p>
+                      <a:pPr>
+                        <a:lnSpc>
+                          <a:spcPct val="102000"/>
+                        </a:lnSpc>
+                        <a:spcAft>
+                          <a:spcPts val="0"/>
+                        </a:spcAft>
+                      </a:pPr>
+                      <a:r>
+                        <a:rPr sz="1700" b="0">
+                          <a:solidFill>
+                            <a:srgbClr val="172235"/>
+                          </a:solidFill>
+                          <a:latin typeface="Aptos"/>
+                        </a:rPr>
+                        <a:t>351,70 ms</a:t>
+                      </a:r>
+                    </a:p>
+                  </a:txBody>
+                  <a:tcPr marL="82296" marR="82296" marT="54864" marB="54864" anchor="ctr">
+                    <a:solidFill>
+                      <a:srgbClr val="F0F2F5"/>
+                    </a:solidFill>
+                  </a:tcPr>
+                </a:tc>
+              </a:tr>
+              <a:tr h="720547">
+                <a:tc>
+                  <a:txBody>
+                    <a:bodyPr wrap="square">
+                      <a:noAutofit/>
+                    </a:bodyPr>
+                    <a:lstStyle/>
+                    <a:p>
+                      <a:pPr>
+                        <a:lnSpc>
+                          <a:spcPct val="102000"/>
+                        </a:lnSpc>
+                        <a:spcAft>
+                          <a:spcPts val="0"/>
+                        </a:spcAft>
+                      </a:pPr>
+                      <a:r>
+                        <a:rPr sz="1700" b="1">
+                          <a:solidFill>
+                            <a:srgbClr val="172235"/>
+                          </a:solidFill>
+                          <a:latin typeface="Aptos"/>
+                        </a:rPr>
+                        <a:t>CPE_03 → ER_03</a:t>
+                      </a:r>
+                    </a:p>
+                  </a:txBody>
+                  <a:tcPr marL="82296" marR="82296" marT="54864" marB="54864" anchor="ctr">
+                    <a:solidFill>
+                      <a:srgbClr val="FFFFFF"/>
+                    </a:solidFill>
+                  </a:tcPr>
+                </a:tc>
+                <a:tc>
+                  <a:txBody>
+                    <a:bodyPr wrap="square">
+                      <a:noAutofit/>
+                    </a:bodyPr>
+                    <a:lstStyle/>
+                    <a:p>
+                      <a:pPr>
+                        <a:lnSpc>
+                          <a:spcPct val="102000"/>
+                        </a:lnSpc>
+                        <a:spcAft>
+                          <a:spcPts val="0"/>
+                        </a:spcAft>
+                      </a:pPr>
+                      <a:r>
+                        <a:rPr sz="1700" b="0">
+                          <a:solidFill>
+                            <a:srgbClr val="172235"/>
+                          </a:solidFill>
+                          <a:latin typeface="Aptos"/>
+                        </a:rPr>
+                        <a:t>Ethernet</a:t>
+                      </a:r>
+                    </a:p>
+                  </a:txBody>
+                  <a:tcPr marL="82296" marR="82296" marT="54864" marB="54864" anchor="ctr">
+                    <a:solidFill>
+                      <a:srgbClr val="FFFFFF"/>
+                    </a:solidFill>
+                  </a:tcPr>
+                </a:tc>
+                <a:tc>
+                  <a:txBody>
+                    <a:bodyPr wrap="square">
+                      <a:noAutofit/>
+                    </a:bodyPr>
+                    <a:lstStyle/>
+                    <a:p>
+                      <a:pPr>
+                        <a:lnSpc>
+                          <a:spcPct val="102000"/>
+                        </a:lnSpc>
+                        <a:spcAft>
+                          <a:spcPts val="0"/>
+                        </a:spcAft>
+                      </a:pPr>
+                      <a:r>
+                        <a:rPr sz="1700" b="0">
+                          <a:solidFill>
+                            <a:srgbClr val="172235"/>
+                          </a:solidFill>
+                          <a:latin typeface="Aptos"/>
+                        </a:rPr>
+                        <a:t>8,65 ms</a:t>
+                      </a:r>
+                    </a:p>
+                  </a:txBody>
+                  <a:tcPr marL="82296" marR="82296" marT="54864" marB="54864" anchor="ctr">
+                    <a:solidFill>
+                      <a:srgbClr val="FFFFFF"/>
+                    </a:solidFill>
+                  </a:tcPr>
+                </a:tc>
+                <a:tc>
+                  <a:txBody>
+                    <a:bodyPr wrap="square">
+                      <a:noAutofit/>
+                    </a:bodyPr>
+                    <a:lstStyle/>
+                    <a:p>
+                      <a:pPr>
+                        <a:lnSpc>
+                          <a:spcPct val="102000"/>
+                        </a:lnSpc>
+                        <a:spcAft>
+                          <a:spcPts val="0"/>
+                        </a:spcAft>
+                      </a:pPr>
+                      <a:r>
+                        <a:rPr sz="1700" b="0">
+                          <a:solidFill>
+                            <a:srgbClr val="172235"/>
+                          </a:solidFill>
+                          <a:latin typeface="Aptos"/>
+                        </a:rPr>
+                        <a:t>360,35 ms</a:t>
                       </a:r>
                     </a:p>
                   </a:txBody>
@@ -42281,7 +42577,7 @@
                 </a:solidFill>
                 <a:latin typeface="Aptos"/>
               </a:rPr>
-              <a:t>LTE_ENB → LTE_CORE → NOC → AP_B; total calculado antes do arredondamento.</a:t>
+              <a:t>Cinco enlaces, um por salto; total calculado antes do arredondamento.</a:t>
             </a:r>
           </a:p>
         </p:txBody>
@@ -42434,7 +42730,7 @@
                 </a:solidFill>
                 <a:latin typeface="Aptos"/>
               </a:rPr>
-              <a:t>Falha de enlace e recálculo de rota</a:t>
+              <a:t>Perda de um meio e comutação para o outro</a:t>
             </a:r>
           </a:p>
         </p:txBody>
@@ -42559,7 +42855,7 @@
                 </a:solidFill>
                 <a:latin typeface="Aptos"/>
               </a:rPr>
-              <a:t>LTE_ENB → LTE_CORE → NOC → AP_B</a:t>
+              <a:t>NOC → eNB_A → RELAY_1 → RELAY_5 → CPE_03 → ER_03</a:t>
             </a:r>
           </a:p>
           <a:p>
@@ -42581,7 +42877,7 @@
                 </a:solidFill>
                 <a:latin typeface="Aptos"/>
               </a:rPr>
-              <a:t>Custo: 70,51 ms do modelo.</a:t>
+              <a:t>Custo: 360,35 ms do modelo; acesso por pLTE.</a:t>
             </a:r>
           </a:p>
         </p:txBody>
@@ -42706,7 +43002,7 @@
                 </a:solidFill>
                 <a:latin typeface="Aptos"/>
               </a:rPr>
-              <a:t>Remover o enlace LTE_ENB–LTE_CORE da topologia da consulta.</a:t>
+              <a:t>Desativar a fibra NOC–eNB_A, o que retira todo o acesso pLTE a partir do núcleo.</a:t>
             </a:r>
           </a:p>
         </p:txBody>
@@ -42831,7 +43127,7 @@
                 </a:solidFill>
                 <a:latin typeface="Aptos"/>
               </a:rPr>
-              <a:t>LTE_ENB → RM_C4 → AP_C → NOC → AP_B</a:t>
+              <a:t>NOC → SAF_01 → SAF_02 → RM_03 → ER_03</a:t>
             </a:r>
           </a:p>
           <a:p>
@@ -42853,7 +43149,7 @@
                 </a:solidFill>
                 <a:latin typeface="Aptos"/>
               </a:rPr>
-              <a:t>Custo: 345,80 ms do modelo.</a:t>
+              <a:t>Custo: 453,51 ms do modelo; acesso por 900 MHz.</a:t>
             </a:r>
           </a:p>
         </p:txBody>
@@ -43006,7 +43302,7 @@
                 </a:solidFill>
                 <a:latin typeface="Aptos"/>
               </a:rPr>
-              <a:t>Esforço de busca no cenário de 30 nós</a:t>
+              <a:t>Esforço de busca no cenário de 60 nós</a:t>
             </a:r>
           </a:p>
         </p:txBody>
@@ -43100,7 +43396,7 @@
         <p:spPr>
           <a:xfrm>
             <a:off x="3337560" y="1673352"/>
-            <a:ext cx="6473952" cy="612648"/>
+            <a:ext cx="6473951" cy="612648"/>
           </a:xfrm>
           <a:prstGeom prst="rect">
             <a:avLst/>
@@ -43174,7 +43470,7 @@
                 </a:solidFill>
                 <a:latin typeface="Aptos"/>
               </a:rPr>
-              <a:t>13 920</a:t>
+              <a:t>109 740</a:t>
             </a:r>
           </a:p>
         </p:txBody>
@@ -43233,7 +43529,7 @@
         <p:spPr>
           <a:xfrm>
             <a:off x="3337560" y="2697480"/>
-            <a:ext cx="4795003" cy="612648"/>
+            <a:ext cx="5897172" cy="612648"/>
           </a:xfrm>
           <a:prstGeom prst="rect">
             <a:avLst/>
@@ -43275,7 +43571,7 @@
         </p:nvSpPr>
         <p:spPr>
           <a:xfrm>
-            <a:off x="8269723" y="2807208"/>
+            <a:off x="9371892" y="2807208"/>
             <a:ext cx="1170432" cy="338328"/>
           </a:xfrm>
           <a:prstGeom prst="rect">
@@ -43307,7 +43603,7 @@
                 </a:solidFill>
                 <a:latin typeface="Aptos"/>
               </a:rPr>
-              <a:t>10 310</a:t>
+              <a:t>99 963</a:t>
             </a:r>
           </a:p>
         </p:txBody>
@@ -43395,7 +43691,7 @@
                 </a:solidFill>
                 <a:latin typeface="Aptos"/>
               </a:rPr>
-              <a:t>870 pares ordenados de origem e destino distintos.</a:t>
+              <a:t>3.540 pares ordenados de origem e destino distintos.</a:t>
             </a:r>
           </a:p>
         </p:txBody>
@@ -43483,7 +43779,7 @@
                 </a:solidFill>
                 <a:latin typeface="Aptos"/>
               </a:rPr>
-              <a:t>Redução agregada de expansões: 25,9%.</a:t>
+              <a:t>Redução agregada de expansões: 8,9%.</a:t>
             </a:r>
           </a:p>
         </p:txBody>
@@ -43571,7 +43867,7 @@
                 </a:solidFill>
                 <a:latin typeface="Aptos"/>
               </a:rPr>
-              <a:t>Custos coincidentes em todos os pares verificados.</a:t>
+              <a:t>Com 30 nós a redução era 25,9%: ela DIMINUIU.</a:t>
             </a:r>
           </a:p>
         </p:txBody>
@@ -43659,7 +43955,7 @@
                 </a:solidFill>
                 <a:latin typeface="Aptos"/>
               </a:rPr>
-              <a:t>Resultado descritivo deste grafo; não estabelece uma lei de escalabilidade.</a:t>
+              <a:t>Duas medições em dois grafos; a vantagem não cresceu com o tamanho.</a:t>
             </a:r>
           </a:p>
         </p:txBody>
@@ -44508,7 +44804,7 @@
                 </a:solidFill>
                 <a:latin typeface="Aptos"/>
               </a:rPr>
-              <a:t>30 nós e 44 enlaces ativos no cenário selecionado.</a:t>
+              <a:t>60 nós e 74 enlaces ativos no cenário selecionado.</a:t>
             </a:r>
           </a:p>
         </p:txBody>
@@ -44596,7 +44892,7 @@
                 </a:solidFill>
                 <a:latin typeface="Aptos"/>
               </a:rPr>
-              <a:t>Três setores, repetidores e rotas alternativas.</a:t>
+              <a:t>Quinze sites com duplo acesso: pLTE e 900 MHz.</a:t>
             </a:r>
           </a:p>
         </p:txBody>
@@ -49901,7 +50197,7 @@
                 </a:solidFill>
                 <a:latin typeface="Consolas"/>
               </a:rPr>
-              <a:t>Caso: congestion      Nó afetado: SAF_A1</a:t>
+              <a:t>Caso: congestion      Nó afetado: SAF_02</a:t>
             </a:r>
           </a:p>
           <a:p>
@@ -49945,7 +50241,7 @@
                 </a:solidFill>
                 <a:latin typeface="Consolas"/>
               </a:rPr>
-              <a:t>Origem: NOC           Destino: FD_A</a:t>
+              <a:t>Origem: NOC           Destino: ER_06</a:t>
             </a:r>
           </a:p>
           <a:p>
@@ -50033,7 +50329,7 @@
                 </a:solidFill>
                 <a:latin typeface="Consolas"/>
               </a:rPr>
-              <a:t>Rota: NOC → LTE_CORE → LTE_ENB → FD_A</a:t>
+              <a:t>Rota: NOC → eNB_A → RELAY_1 → RELAY_5 → CPE_06 → ER_06</a:t>
             </a:r>
           </a:p>
           <a:p>
@@ -50055,7 +50351,7 @@
                 </a:solidFill>
                 <a:latin typeface="Consolas"/>
               </a:rPr>
-              <a:t>Custo da rota: 267,06 ms do modelo</a:t>
+              <a:t>Custo da rota: 509,55 ms do modelo</a:t>
             </a:r>
           </a:p>
         </p:txBody>
@@ -50143,7 +50439,7 @@
                 </a:solidFill>
                 <a:latin typeface="Aptos"/>
               </a:rPr>
-              <a:t>O caminho exclui SAF_A1 e corresponde ao destino utilizado para validar o desvio.</a:t>
+              <a:t>O desvio exclui SAF_02 e move o site da malha de 900 MHz para o pLTE.</a:t>
             </a:r>
           </a:p>
         </p:txBody>

--- a/docs/presentation/mini-systems-presentation.pptx
+++ b/docs/presentation/mini-systems-presentation.pptx
@@ -49652,10 +49652,10 @@
       </p:sp>
       <p:pic>
         <p:nvPicPr>
-          <p:cNvPr id="106" name="Picture 105">
+          <p:cNvPr id="7" name="Picture 6">
             <a:extLst>
               <a:ext uri="{FF2B5EF4-FFF2-40B4-BE49-F238E27FC236}">
-                <a16:creationId xmlns:a16="http://schemas.microsoft.com/office/drawing/2014/main" id="{339A362F-327F-4BE9-C64F-30FF5CEDE600}"/>
+                <a16:creationId xmlns:a16="http://schemas.microsoft.com/office/drawing/2014/main" id="{4693EBCC-D005-7FCE-1747-3DF8D3403FE1}"/>
               </a:ext>
             </a:extLst>
           </p:cNvPr>
@@ -49672,8 +49672,8 @@
         </p:blipFill>
         <p:spPr>
           <a:xfrm>
-            <a:off x="1419154" y="1061315"/>
-            <a:ext cx="8738207" cy="5214736"/>
+            <a:off x="1093354" y="1080196"/>
+            <a:ext cx="8780488" cy="5239968"/>
           </a:xfrm>
           <a:prstGeom prst="rect">
             <a:avLst/>

--- a/docs/presentation/mini-systems-presentation.pptx
+++ b/docs/presentation/mini-systems-presentation.pptx
@@ -7168,7 +7168,7 @@
           </a:p>
           <a:p>
             <a:r>
-              <a:t>[6] https://github.com/fsd-dantas/ai-for-smartgrids</a:t>
+              <a:t>[6] https://github.com/fsd-dantas/ai4systems</a:t>
             </a:r>
           </a:p>
         </p:txBody>
